--- a/Reporte 231026.pptx
+++ b/Reporte 231026.pptx
@@ -6777,10 +6777,10 @@
       </p:sp>
       <p:pic>
         <p:nvPicPr>
-          <p:cNvPr id="5" name="Imagen 4">
+          <p:cNvPr id="4" name="Imagen 3">
             <a:extLst>
               <a:ext uri="{FF2B5EF4-FFF2-40B4-BE49-F238E27FC236}">
-                <a16:creationId xmlns:a16="http://schemas.microsoft.com/office/drawing/2014/main" id="{1626776E-FCC8-F13B-C66E-A73F3531468A}"/>
+                <a16:creationId xmlns:a16="http://schemas.microsoft.com/office/drawing/2014/main" id="{2FD83FDF-2F49-79E3-1F94-D15136BB30E9}"/>
               </a:ext>
             </a:extLst>
           </p:cNvPr>
@@ -6797,8 +6797,8 @@
         </p:blipFill>
         <p:spPr>
           <a:xfrm>
-            <a:off x="0" y="936274"/>
-            <a:ext cx="9144000" cy="3413827"/>
+            <a:off x="0" y="945088"/>
+            <a:ext cx="9144000" cy="3396199"/>
           </a:xfrm>
           <a:prstGeom prst="rect">
             <a:avLst/>
@@ -6883,10 +6883,10 @@
       </p:sp>
       <p:pic>
         <p:nvPicPr>
-          <p:cNvPr id="4" name="Imagen 3">
+          <p:cNvPr id="3" name="Imagen 2">
             <a:extLst>
               <a:ext uri="{FF2B5EF4-FFF2-40B4-BE49-F238E27FC236}">
-                <a16:creationId xmlns:a16="http://schemas.microsoft.com/office/drawing/2014/main" id="{00D14A36-5D4A-C4B3-E36A-4F523543B29D}"/>
+                <a16:creationId xmlns:a16="http://schemas.microsoft.com/office/drawing/2014/main" id="{97D40533-55E1-9621-64A1-05343AEE3EA6}"/>
               </a:ext>
             </a:extLst>
           </p:cNvPr>
@@ -6903,8 +6903,8 @@
         </p:blipFill>
         <p:spPr>
           <a:xfrm>
-            <a:off x="0" y="1331157"/>
-            <a:ext cx="9144000" cy="2624062"/>
+            <a:off x="0" y="1266882"/>
+            <a:ext cx="9144000" cy="2609736"/>
           </a:xfrm>
           <a:prstGeom prst="rect">
             <a:avLst/>
@@ -6989,10 +6989,10 @@
       </p:sp>
       <p:pic>
         <p:nvPicPr>
-          <p:cNvPr id="5" name="Imagen 4">
+          <p:cNvPr id="4" name="Imagen 3">
             <a:extLst>
               <a:ext uri="{FF2B5EF4-FFF2-40B4-BE49-F238E27FC236}">
-                <a16:creationId xmlns:a16="http://schemas.microsoft.com/office/drawing/2014/main" id="{027C179A-E26C-3CAA-97FA-82A9A6BD3916}"/>
+                <a16:creationId xmlns:a16="http://schemas.microsoft.com/office/drawing/2014/main" id="{F7327E53-A3F0-2F75-6982-50D7DF50BD7B}"/>
               </a:ext>
             </a:extLst>
           </p:cNvPr>
@@ -7009,8 +7009,8 @@
         </p:blipFill>
         <p:spPr>
           <a:xfrm>
-            <a:off x="0" y="700663"/>
-            <a:ext cx="9144000" cy="3885050"/>
+            <a:off x="0" y="724318"/>
+            <a:ext cx="9144000" cy="3837739"/>
           </a:xfrm>
           <a:prstGeom prst="rect">
             <a:avLst/>
@@ -7095,10 +7095,10 @@
       </p:sp>
       <p:pic>
         <p:nvPicPr>
-          <p:cNvPr id="4" name="Imagen 3">
+          <p:cNvPr id="3" name="Imagen 2">
             <a:extLst>
               <a:ext uri="{FF2B5EF4-FFF2-40B4-BE49-F238E27FC236}">
-                <a16:creationId xmlns:a16="http://schemas.microsoft.com/office/drawing/2014/main" id="{5F3B7291-6D92-14DA-3CE6-4486EADB871E}"/>
+                <a16:creationId xmlns:a16="http://schemas.microsoft.com/office/drawing/2014/main" id="{89ECFA43-6F43-9EC6-E276-B80E5F8B62CF}"/>
               </a:ext>
             </a:extLst>
           </p:cNvPr>
@@ -7115,8 +7115,8 @@
         </p:blipFill>
         <p:spPr>
           <a:xfrm>
-            <a:off x="0" y="1264569"/>
-            <a:ext cx="9144000" cy="2757237"/>
+            <a:off x="0" y="1253239"/>
+            <a:ext cx="9144000" cy="2779897"/>
           </a:xfrm>
           <a:prstGeom prst="rect">
             <a:avLst/>
@@ -7207,10 +7207,10 @@
       </p:sp>
       <p:pic>
         <p:nvPicPr>
-          <p:cNvPr id="3" name="Imagen 2">
+          <p:cNvPr id="4" name="Imagen 3">
             <a:extLst>
               <a:ext uri="{FF2B5EF4-FFF2-40B4-BE49-F238E27FC236}">
-                <a16:creationId xmlns:a16="http://schemas.microsoft.com/office/drawing/2014/main" id="{D4D9B1D3-8ED7-3281-CE94-2844EB8C031F}"/>
+                <a16:creationId xmlns:a16="http://schemas.microsoft.com/office/drawing/2014/main" id="{182C56B5-6A8C-5787-6600-F83E20A1FC18}"/>
               </a:ext>
             </a:extLst>
           </p:cNvPr>
@@ -7227,8 +7227,8 @@
         </p:blipFill>
         <p:spPr>
           <a:xfrm>
-            <a:off x="0" y="625544"/>
-            <a:ext cx="9144000" cy="4035287"/>
+            <a:off x="0" y="1513973"/>
+            <a:ext cx="9144000" cy="2115553"/>
           </a:xfrm>
           <a:prstGeom prst="rect">
             <a:avLst/>
@@ -7319,10 +7319,10 @@
       </p:sp>
       <p:pic>
         <p:nvPicPr>
-          <p:cNvPr id="3" name="Imagen 2">
+          <p:cNvPr id="4" name="Imagen 3">
             <a:extLst>
               <a:ext uri="{FF2B5EF4-FFF2-40B4-BE49-F238E27FC236}">
-                <a16:creationId xmlns:a16="http://schemas.microsoft.com/office/drawing/2014/main" id="{75406957-2228-4F64-B8F3-F9AEEACD23D4}"/>
+                <a16:creationId xmlns:a16="http://schemas.microsoft.com/office/drawing/2014/main" id="{DC4A25B2-D926-9980-9F32-FF6F103468C2}"/>
               </a:ext>
             </a:extLst>
           </p:cNvPr>
@@ -7339,8 +7339,8 @@
         </p:blipFill>
         <p:spPr>
           <a:xfrm>
-            <a:off x="601663" y="597665"/>
-            <a:ext cx="7867650" cy="4457700"/>
+            <a:off x="3024736" y="317981"/>
+            <a:ext cx="3021504" cy="4825519"/>
           </a:xfrm>
           <a:prstGeom prst="rect">
             <a:avLst/>
